--- a/sharp/3 Условные алгоритмы.pptx
+++ b/sharp/3 Условные алгоритмы.pptx
@@ -10,9 +10,9 @@
   <p:sldIdLst>
     <p:sldId id="256" r:id="rId2"/>
     <p:sldId id="265" r:id="rId3"/>
-    <p:sldId id="279" r:id="rId4"/>
-    <p:sldId id="285" r:id="rId5"/>
-    <p:sldId id="286" r:id="rId6"/>
+    <p:sldId id="285" r:id="rId4"/>
+    <p:sldId id="286" r:id="rId5"/>
+    <p:sldId id="289" r:id="rId6"/>
     <p:sldId id="287" r:id="rId7"/>
     <p:sldId id="288" r:id="rId8"/>
   </p:sldIdLst>
@@ -199,7 +199,7 @@
             <a:fld id="{D42B9B73-3143-4350-BBED-DEE082F6FAFE}" type="datetimeFigureOut">
               <a:rPr lang="ru-RU" smtClean="0"/>
               <a:pPr/>
-              <a:t>04.03.2026</a:t>
+              <a:t>12.03.2026</a:t>
             </a:fld>
             <a:endParaRPr lang="ru-RU"/>
           </a:p>
@@ -647,7 +647,7 @@
             <a:fld id="{0FF7147C-2AAC-473E-AD87-1A0FFEE67DAA}" type="datetimeFigureOut">
               <a:rPr lang="ru-RU" smtClean="0"/>
               <a:pPr/>
-              <a:t>04.03.2026</a:t>
+              <a:t>12.03.2026</a:t>
             </a:fld>
             <a:endParaRPr lang="ru-RU"/>
           </a:p>
@@ -814,7 +814,7 @@
             <a:fld id="{0FF7147C-2AAC-473E-AD87-1A0FFEE67DAA}" type="datetimeFigureOut">
               <a:rPr lang="ru-RU" smtClean="0"/>
               <a:pPr/>
-              <a:t>04.03.2026</a:t>
+              <a:t>12.03.2026</a:t>
             </a:fld>
             <a:endParaRPr lang="ru-RU"/>
           </a:p>
@@ -991,7 +991,7 @@
             <a:fld id="{0FF7147C-2AAC-473E-AD87-1A0FFEE67DAA}" type="datetimeFigureOut">
               <a:rPr lang="ru-RU" smtClean="0"/>
               <a:pPr/>
-              <a:t>04.03.2026</a:t>
+              <a:t>12.03.2026</a:t>
             </a:fld>
             <a:endParaRPr lang="ru-RU"/>
           </a:p>
@@ -1158,7 +1158,7 @@
             <a:fld id="{0FF7147C-2AAC-473E-AD87-1A0FFEE67DAA}" type="datetimeFigureOut">
               <a:rPr lang="ru-RU" smtClean="0"/>
               <a:pPr/>
-              <a:t>04.03.2026</a:t>
+              <a:t>12.03.2026</a:t>
             </a:fld>
             <a:endParaRPr lang="ru-RU"/>
           </a:p>
@@ -1401,7 +1401,7 @@
             <a:fld id="{0FF7147C-2AAC-473E-AD87-1A0FFEE67DAA}" type="datetimeFigureOut">
               <a:rPr lang="ru-RU" smtClean="0"/>
               <a:pPr/>
-              <a:t>04.03.2026</a:t>
+              <a:t>12.03.2026</a:t>
             </a:fld>
             <a:endParaRPr lang="ru-RU"/>
           </a:p>
@@ -1686,7 +1686,7 @@
             <a:fld id="{0FF7147C-2AAC-473E-AD87-1A0FFEE67DAA}" type="datetimeFigureOut">
               <a:rPr lang="ru-RU" smtClean="0"/>
               <a:pPr/>
-              <a:t>04.03.2026</a:t>
+              <a:t>12.03.2026</a:t>
             </a:fld>
             <a:endParaRPr lang="ru-RU"/>
           </a:p>
@@ -2105,7 +2105,7 @@
             <a:fld id="{0FF7147C-2AAC-473E-AD87-1A0FFEE67DAA}" type="datetimeFigureOut">
               <a:rPr lang="ru-RU" smtClean="0"/>
               <a:pPr/>
-              <a:t>04.03.2026</a:t>
+              <a:t>12.03.2026</a:t>
             </a:fld>
             <a:endParaRPr lang="ru-RU"/>
           </a:p>
@@ -2220,7 +2220,7 @@
             <a:fld id="{0FF7147C-2AAC-473E-AD87-1A0FFEE67DAA}" type="datetimeFigureOut">
               <a:rPr lang="ru-RU" smtClean="0"/>
               <a:pPr/>
-              <a:t>04.03.2026</a:t>
+              <a:t>12.03.2026</a:t>
             </a:fld>
             <a:endParaRPr lang="ru-RU"/>
           </a:p>
@@ -2312,7 +2312,7 @@
             <a:fld id="{0FF7147C-2AAC-473E-AD87-1A0FFEE67DAA}" type="datetimeFigureOut">
               <a:rPr lang="ru-RU" smtClean="0"/>
               <a:pPr/>
-              <a:t>04.03.2026</a:t>
+              <a:t>12.03.2026</a:t>
             </a:fld>
             <a:endParaRPr lang="ru-RU"/>
           </a:p>
@@ -2586,7 +2586,7 @@
             <a:fld id="{0FF7147C-2AAC-473E-AD87-1A0FFEE67DAA}" type="datetimeFigureOut">
               <a:rPr lang="ru-RU" smtClean="0"/>
               <a:pPr/>
-              <a:t>04.03.2026</a:t>
+              <a:t>12.03.2026</a:t>
             </a:fld>
             <a:endParaRPr lang="ru-RU"/>
           </a:p>
@@ -2836,7 +2836,7 @@
             <a:fld id="{0FF7147C-2AAC-473E-AD87-1A0FFEE67DAA}" type="datetimeFigureOut">
               <a:rPr lang="ru-RU" smtClean="0"/>
               <a:pPr/>
-              <a:t>04.03.2026</a:t>
+              <a:t>12.03.2026</a:t>
             </a:fld>
             <a:endParaRPr lang="ru-RU"/>
           </a:p>
@@ -3046,7 +3046,7 @@
             <a:fld id="{0FF7147C-2AAC-473E-AD87-1A0FFEE67DAA}" type="datetimeFigureOut">
               <a:rPr lang="ru-RU" smtClean="0"/>
               <a:pPr/>
-              <a:t>04.03.2026</a:t>
+              <a:t>12.03.2026</a:t>
             </a:fld>
             <a:endParaRPr lang="ru-RU"/>
           </a:p>
@@ -3442,33 +3442,6 @@
           </a:p>
         </p:txBody>
       </p:sp>
-      <p:sp>
-        <p:nvSpPr>
-          <p:cNvPr id="3" name="Подзаголовок 2"/>
-          <p:cNvSpPr>
-            <a:spLocks noGrp="1"/>
-          </p:cNvSpPr>
-          <p:nvPr>
-            <p:ph type="subTitle" idx="1"/>
-          </p:nvPr>
-        </p:nvSpPr>
-        <p:spPr/>
-        <p:txBody>
-          <a:bodyPr/>
-          <a:lstStyle/>
-          <a:p>
-            <a:r>
-              <a:rPr lang="ru-RU" dirty="0" smtClean="0"/>
-              <a:t>Практика </a:t>
-            </a:r>
-            <a:r>
-              <a:rPr lang="en-US" dirty="0" smtClean="0"/>
-              <a:t>3</a:t>
-            </a:r>
-            <a:endParaRPr lang="ru-RU" dirty="0"/>
-          </a:p>
-        </p:txBody>
-      </p:sp>
     </p:spTree>
   </p:cSld>
   <p:clrMapOvr>
@@ -3774,179 +3747,24 @@
       </p:grpSpPr>
       <p:sp>
         <p:nvSpPr>
-          <p:cNvPr id="10" name="Заголовок 1"/>
-          <p:cNvSpPr txBox="1">
-            <a:spLocks/>
-          </p:cNvSpPr>
+          <p:cNvPr id="27" name="Прямоугольник 26"/>
+          <p:cNvSpPr/>
           <p:nvPr/>
         </p:nvSpPr>
         <p:spPr>
           <a:xfrm>
-            <a:off x="428596" y="0"/>
-            <a:ext cx="8229600" cy="1143000"/>
+            <a:off x="0" y="1142984"/>
+            <a:ext cx="4071934" cy="1071570"/>
           </a:xfrm>
           <a:prstGeom prst="rect">
             <a:avLst/>
           </a:prstGeom>
-        </p:spPr>
-        <p:txBody>
-          <a:bodyPr vert="horz" lIns="91440" tIns="45720" rIns="91440" bIns="45720" rtlCol="0" anchor="ctr">
-            <a:normAutofit fontScale="90000" lnSpcReduction="20000"/>
-          </a:bodyPr>
-          <a:lstStyle/>
-          <a:p>
-            <a:pPr marL="0" marR="0" lvl="0" indent="0" algn="ctr" defTabSz="914400" rtl="0" eaLnBrk="1" fontAlgn="auto" latinLnBrk="0" hangingPunct="1">
-              <a:lnSpc>
-                <a:spcPct val="100000"/>
-              </a:lnSpc>
-              <a:spcBef>
-                <a:spcPct val="0"/>
-              </a:spcBef>
-              <a:spcAft>
-                <a:spcPts val="0"/>
-              </a:spcAft>
-              <a:buClrTx/>
-              <a:buSzTx/>
-              <a:buFontTx/>
-              <a:buNone/>
-              <a:tabLst/>
-              <a:defRPr/>
-            </a:pPr>
-            <a:r>
-              <a:rPr kumimoji="0" lang="ru-RU" sz="4400" b="1" i="0" u="none" strike="noStrike" kern="1200" cap="none" spc="0" normalizeH="0" baseline="0" noProof="0" dirty="0" smtClean="0">
-                <a:ln>
-                  <a:noFill/>
-                </a:ln>
-                <a:solidFill>
-                  <a:schemeClr val="tx1"/>
-                </a:solidFill>
-                <a:effectLst/>
-                <a:uLnTx/>
-                <a:uFillTx/>
-                <a:latin typeface="+mj-lt"/>
-                <a:ea typeface="+mj-ea"/>
-                <a:cs typeface="+mj-cs"/>
-              </a:rPr>
-              <a:t>Задание </a:t>
-            </a:r>
-            <a:r>
-              <a:rPr kumimoji="0" lang="en-US" sz="4400" b="1" i="0" u="none" strike="noStrike" kern="1200" cap="none" spc="0" normalizeH="0" baseline="0" noProof="0" dirty="0" smtClean="0">
-                <a:ln>
-                  <a:noFill/>
-                </a:ln>
-                <a:solidFill>
-                  <a:schemeClr val="tx1"/>
-                </a:solidFill>
-                <a:effectLst/>
-                <a:uLnTx/>
-                <a:uFillTx/>
-                <a:latin typeface="+mj-lt"/>
-                <a:ea typeface="+mj-ea"/>
-                <a:cs typeface="+mj-cs"/>
-              </a:rPr>
-              <a:t>1</a:t>
-            </a:r>
-            <a:r>
-              <a:rPr kumimoji="0" lang="ru-RU" sz="4400" b="1" i="0" u="none" strike="noStrike" kern="1200" cap="none" spc="0" normalizeH="0" baseline="0" noProof="0" dirty="0" smtClean="0">
-                <a:ln>
-                  <a:noFill/>
-                </a:ln>
-                <a:solidFill>
-                  <a:schemeClr val="tx1"/>
-                </a:solidFill>
-                <a:effectLst/>
-                <a:uLnTx/>
-                <a:uFillTx/>
-                <a:latin typeface="+mj-lt"/>
-                <a:ea typeface="+mj-ea"/>
-                <a:cs typeface="+mj-cs"/>
-              </a:rPr>
-              <a:t/>
-            </a:r>
-            <a:br>
-              <a:rPr kumimoji="0" lang="ru-RU" sz="4400" b="1" i="0" u="none" strike="noStrike" kern="1200" cap="none" spc="0" normalizeH="0" baseline="0" noProof="0" dirty="0" smtClean="0">
-                <a:ln>
-                  <a:noFill/>
-                </a:ln>
-                <a:solidFill>
-                  <a:schemeClr val="tx1"/>
-                </a:solidFill>
-                <a:effectLst/>
-                <a:uLnTx/>
-                <a:uFillTx/>
-                <a:latin typeface="+mj-lt"/>
-                <a:ea typeface="+mj-ea"/>
-                <a:cs typeface="+mj-cs"/>
-              </a:rPr>
-            </a:br>
-            <a:endParaRPr kumimoji="0" lang="ru-RU" sz="4400" b="0" i="0" u="none" strike="noStrike" kern="1200" cap="none" spc="0" normalizeH="0" baseline="0" noProof="0" dirty="0">
-              <a:ln>
-                <a:noFill/>
-              </a:ln>
-              <a:solidFill>
-                <a:schemeClr val="tx1"/>
-              </a:solidFill>
-              <a:effectLst/>
-              <a:uLnTx/>
-              <a:uFillTx/>
-              <a:latin typeface="+mj-lt"/>
-              <a:ea typeface="+mj-ea"/>
-              <a:cs typeface="+mj-cs"/>
-            </a:endParaRPr>
-          </a:p>
-        </p:txBody>
-      </p:sp>
-      <p:pic>
-        <p:nvPicPr>
-          <p:cNvPr id="11" name="Picture 2"/>
-          <p:cNvPicPr>
-            <a:picLocks noChangeAspect="1" noChangeArrowheads="1"/>
-          </p:cNvPicPr>
-          <p:nvPr/>
-        </p:nvPicPr>
-        <p:blipFill>
-          <a:blip r:embed="rId2"/>
-          <a:srcRect/>
-          <a:stretch>
-            <a:fillRect/>
-          </a:stretch>
-        </p:blipFill>
-        <p:spPr bwMode="auto">
-          <a:xfrm>
-            <a:off x="142844" y="1500174"/>
-            <a:ext cx="4214842" cy="4214842"/>
-          </a:xfrm>
-          <a:prstGeom prst="rect">
-            <a:avLst/>
-          </a:prstGeom>
-          <a:noFill/>
-          <a:ln w="9525">
-            <a:noFill/>
-            <a:miter lim="800000"/>
-            <a:headEnd/>
-            <a:tailEnd/>
-          </a:ln>
-          <a:effectLst/>
-        </p:spPr>
-      </p:pic>
-      <p:sp>
-        <p:nvSpPr>
-          <p:cNvPr id="14" name="Скругленный прямоугольник 13"/>
-          <p:cNvSpPr/>
-          <p:nvPr/>
-        </p:nvSpPr>
-        <p:spPr>
-          <a:xfrm>
-            <a:off x="1357290" y="2714620"/>
-            <a:ext cx="1643074" cy="571504"/>
-          </a:xfrm>
-          <a:prstGeom prst="roundRect">
-            <a:avLst/>
-          </a:prstGeom>
-          <a:noFill/>
+          <a:solidFill>
+            <a:schemeClr val="bg2"/>
+          </a:solidFill>
           <a:ln>
             <a:solidFill>
-              <a:srgbClr val="FF0000"/>
+              <a:schemeClr val="tx1"/>
             </a:solidFill>
           </a:ln>
         </p:spPr>
@@ -3975,99 +3793,105 @@
           </a:p>
         </p:txBody>
       </p:sp>
-      <p:cxnSp>
-        <p:nvCxnSpPr>
-          <p:cNvPr id="17" name="Прямая со стрелкой 16"/>
-          <p:cNvCxnSpPr>
-            <a:endCxn id="14" idx="3"/>
-          </p:cNvCxnSpPr>
+      <p:sp>
+        <p:nvSpPr>
+          <p:cNvPr id="2" name="Заголовок 1"/>
+          <p:cNvSpPr>
+            <a:spLocks noGrp="1"/>
+          </p:cNvSpPr>
+          <p:nvPr>
+            <p:ph type="title"/>
+          </p:nvPr>
+        </p:nvSpPr>
+        <p:spPr>
+          <a:xfrm>
+            <a:off x="414366" y="214290"/>
+            <a:ext cx="8229600" cy="1143000"/>
+          </a:xfrm>
+        </p:spPr>
+        <p:txBody>
+          <a:bodyPr>
+            <a:normAutofit fontScale="90000"/>
+          </a:bodyPr>
+          <a:lstStyle/>
+          <a:p>
+            <a:r>
+              <a:rPr lang="ru-RU" b="1" dirty="0" smtClean="0"/>
+              <a:t>Задание </a:t>
+            </a:r>
+            <a:r>
+              <a:rPr lang="en-US" b="1" dirty="0" smtClean="0"/>
+              <a:t>1</a:t>
+            </a:r>
+            <a:r>
+              <a:rPr lang="ru-RU" b="1" dirty="0" smtClean="0"/>
+              <a:t/>
+            </a:r>
+            <a:br>
+              <a:rPr lang="ru-RU" b="1" dirty="0" smtClean="0"/>
+            </a:br>
+            <a:r>
+              <a:rPr lang="ru-RU" b="1" dirty="0" smtClean="0"/>
+              <a:t>Решение с помощью ООП</a:t>
+            </a:r>
+            <a:br>
+              <a:rPr lang="ru-RU" b="1" dirty="0" smtClean="0"/>
+            </a:br>
+            <a:endParaRPr lang="ru-RU" dirty="0"/>
+          </a:p>
+        </p:txBody>
+      </p:sp>
+      <p:pic>
+        <p:nvPicPr>
+          <p:cNvPr id="3074" name="Picture 2"/>
+          <p:cNvPicPr>
+            <a:picLocks noChangeAspect="1" noChangeArrowheads="1"/>
+          </p:cNvPicPr>
           <p:nvPr/>
-        </p:nvCxnSpPr>
-        <p:spPr>
-          <a:xfrm rot="10800000" flipV="1">
-            <a:off x="3000364" y="1785924"/>
-            <a:ext cx="2571768" cy="1214448"/>
-          </a:xfrm>
-          <a:prstGeom prst="straightConnector1">
-            <a:avLst/>
-          </a:prstGeom>
-          <a:ln w="25400">
-            <a:solidFill>
-              <a:srgbClr val="FF0000"/>
-            </a:solidFill>
-            <a:tailEnd type="arrow"/>
-          </a:ln>
-        </p:spPr>
-        <p:style>
-          <a:lnRef idx="1">
-            <a:schemeClr val="accent1"/>
-          </a:lnRef>
-          <a:fillRef idx="0">
-            <a:schemeClr val="accent1"/>
-          </a:fillRef>
-          <a:effectRef idx="0">
-            <a:schemeClr val="accent1"/>
-          </a:effectRef>
-          <a:fontRef idx="minor">
-            <a:schemeClr val="tx1"/>
-          </a:fontRef>
-        </p:style>
-      </p:cxnSp>
-      <p:cxnSp>
-        <p:nvCxnSpPr>
-          <p:cNvPr id="18" name="Прямая соединительная линия 17"/>
-          <p:cNvCxnSpPr/>
-          <p:nvPr/>
-        </p:nvCxnSpPr>
-        <p:spPr>
-          <a:xfrm rot="10800000">
-            <a:off x="5572132" y="1785926"/>
-            <a:ext cx="2500330" cy="4275"/>
-          </a:xfrm>
-          <a:prstGeom prst="line">
-            <a:avLst/>
-          </a:prstGeom>
-          <a:ln w="25400">
-            <a:solidFill>
-              <a:srgbClr val="FF0000"/>
-            </a:solidFill>
-          </a:ln>
-        </p:spPr>
-        <p:style>
-          <a:lnRef idx="1">
-            <a:schemeClr val="accent1"/>
-          </a:lnRef>
-          <a:fillRef idx="0">
-            <a:schemeClr val="accent1"/>
-          </a:fillRef>
-          <a:effectRef idx="0">
-            <a:schemeClr val="accent1"/>
-          </a:effectRef>
-          <a:fontRef idx="minor">
-            <a:schemeClr val="tx1"/>
-          </a:fontRef>
-        </p:style>
-      </p:cxnSp>
-      <p:sp>
-        <p:nvSpPr>
-          <p:cNvPr id="21" name="Прямоугольник 20"/>
-          <p:cNvSpPr/>
-          <p:nvPr/>
-        </p:nvSpPr>
-        <p:spPr>
-          <a:xfrm>
-            <a:off x="5357818" y="785794"/>
-            <a:ext cx="3143272" cy="1000132"/>
+        </p:nvPicPr>
+        <p:blipFill>
+          <a:blip r:embed="rId2"/>
+          <a:srcRect/>
+          <a:stretch>
+            <a:fillRect/>
+          </a:stretch>
+        </p:blipFill>
+        <p:spPr bwMode="auto">
+          <a:xfrm>
+            <a:off x="357158" y="2390775"/>
+            <a:ext cx="5591175" cy="4467225"/>
           </a:xfrm>
           <a:prstGeom prst="rect">
             <a:avLst/>
           </a:prstGeom>
-          <a:solidFill>
-            <a:schemeClr val="bg2"/>
-          </a:solidFill>
+          <a:noFill/>
+          <a:ln w="9525">
+            <a:noFill/>
+            <a:miter lim="800000"/>
+            <a:headEnd/>
+            <a:tailEnd/>
+          </a:ln>
+          <a:effectLst/>
+        </p:spPr>
+      </p:pic>
+      <p:sp>
+        <p:nvSpPr>
+          <p:cNvPr id="11" name="Скругленный прямоугольник 10"/>
+          <p:cNvSpPr/>
+          <p:nvPr/>
+        </p:nvSpPr>
+        <p:spPr>
+          <a:xfrm>
+            <a:off x="642910" y="2747965"/>
+            <a:ext cx="2143140" cy="571504"/>
+          </a:xfrm>
+          <a:prstGeom prst="roundRect">
+            <a:avLst/>
+          </a:prstGeom>
+          <a:noFill/>
           <a:ln>
             <a:solidFill>
-              <a:schemeClr val="tx1"/>
+              <a:srgbClr val="FF0000"/>
             </a:solidFill>
           </a:ln>
         </p:spPr>
@@ -4096,6 +3920,90 @@
           </a:p>
         </p:txBody>
       </p:sp>
+      <p:cxnSp>
+        <p:nvCxnSpPr>
+          <p:cNvPr id="14" name="Прямая со стрелкой 13"/>
+          <p:cNvCxnSpPr>
+            <a:endCxn id="11" idx="3"/>
+          </p:cNvCxnSpPr>
+          <p:nvPr/>
+        </p:nvCxnSpPr>
+        <p:spPr>
+          <a:xfrm rot="10800000" flipV="1">
+            <a:off x="2786050" y="2462213"/>
+            <a:ext cx="3357586" cy="571504"/>
+          </a:xfrm>
+          <a:prstGeom prst="straightConnector1">
+            <a:avLst/>
+          </a:prstGeom>
+          <a:ln w="25400">
+            <a:solidFill>
+              <a:srgbClr val="FF0000"/>
+            </a:solidFill>
+            <a:tailEnd type="arrow"/>
+          </a:ln>
+        </p:spPr>
+        <p:style>
+          <a:lnRef idx="1">
+            <a:schemeClr val="accent1"/>
+          </a:lnRef>
+          <a:fillRef idx="0">
+            <a:schemeClr val="accent1"/>
+          </a:fillRef>
+          <a:effectRef idx="0">
+            <a:schemeClr val="accent1"/>
+          </a:effectRef>
+          <a:fontRef idx="minor">
+            <a:schemeClr val="tx1"/>
+          </a:fontRef>
+        </p:style>
+      </p:cxnSp>
+      <p:sp>
+        <p:nvSpPr>
+          <p:cNvPr id="21" name="Скругленный прямоугольник 20"/>
+          <p:cNvSpPr/>
+          <p:nvPr/>
+        </p:nvSpPr>
+        <p:spPr>
+          <a:xfrm>
+            <a:off x="642910" y="3890973"/>
+            <a:ext cx="5429288" cy="2643206"/>
+          </a:xfrm>
+          <a:prstGeom prst="roundRect">
+            <a:avLst/>
+          </a:prstGeom>
+          <a:noFill/>
+          <a:ln>
+            <a:solidFill>
+              <a:srgbClr val="FF0000"/>
+            </a:solidFill>
+          </a:ln>
+        </p:spPr>
+        <p:style>
+          <a:lnRef idx="2">
+            <a:schemeClr val="accent1">
+              <a:shade val="50000"/>
+            </a:schemeClr>
+          </a:lnRef>
+          <a:fillRef idx="1">
+            <a:schemeClr val="accent1"/>
+          </a:fillRef>
+          <a:effectRef idx="0">
+            <a:schemeClr val="accent1"/>
+          </a:effectRef>
+          <a:fontRef idx="minor">
+            <a:schemeClr val="lt1"/>
+          </a:fontRef>
+        </p:style>
+        <p:txBody>
+          <a:bodyPr rtlCol="0" anchor="ctr"/>
+          <a:lstStyle/>
+          <a:p>
+            <a:pPr algn="ctr"/>
+            <a:endParaRPr lang="ru-RU"/>
+          </a:p>
+        </p:txBody>
+      </p:sp>
       <p:sp>
         <p:nvSpPr>
           <p:cNvPr id="22" name="Прямоугольник 21"/>
@@ -4104,61 +4012,314 @@
         </p:nvSpPr>
         <p:spPr>
           <a:xfrm>
-            <a:off x="5357818" y="857232"/>
-            <a:ext cx="3000396" cy="707886"/>
+            <a:off x="4572000" y="1747833"/>
+            <a:ext cx="4572000" cy="646331"/>
           </a:xfrm>
           <a:prstGeom prst="rect">
             <a:avLst/>
           </a:prstGeom>
         </p:spPr>
         <p:txBody>
+          <a:bodyPr>
+            <a:spAutoFit/>
+          </a:bodyPr>
+          <a:lstStyle/>
+          <a:p>
+            <a:pPr algn="just"/>
+            <a:r>
+              <a:rPr lang="ru-RU" b="1" dirty="0" smtClean="0">
+                <a:latin typeface="Cambria" pitchFamily="18" charset="0"/>
+              </a:rPr>
+              <a:t>Поля класса</a:t>
+            </a:r>
+            <a:r>
+              <a:rPr lang="ru-RU" dirty="0" smtClean="0">
+                <a:latin typeface="Cambria" pitchFamily="18" charset="0"/>
+              </a:rPr>
+              <a:t> — это данные, содержащиеся внутри класса.</a:t>
+            </a:r>
+          </a:p>
+        </p:txBody>
+      </p:sp>
+      <p:cxnSp>
+        <p:nvCxnSpPr>
+          <p:cNvPr id="23" name="Прямая со стрелкой 22"/>
+          <p:cNvCxnSpPr/>
+          <p:nvPr/>
+        </p:nvCxnSpPr>
+        <p:spPr>
+          <a:xfrm rot="10800000" flipV="1">
+            <a:off x="6072198" y="4929198"/>
+            <a:ext cx="571504" cy="390534"/>
+          </a:xfrm>
+          <a:prstGeom prst="straightConnector1">
+            <a:avLst/>
+          </a:prstGeom>
+          <a:ln w="25400">
+            <a:solidFill>
+              <a:srgbClr val="FF0000"/>
+            </a:solidFill>
+            <a:tailEnd type="arrow"/>
+          </a:ln>
+        </p:spPr>
+        <p:style>
+          <a:lnRef idx="1">
+            <a:schemeClr val="accent1"/>
+          </a:lnRef>
+          <a:fillRef idx="0">
+            <a:schemeClr val="accent1"/>
+          </a:fillRef>
+          <a:effectRef idx="0">
+            <a:schemeClr val="accent1"/>
+          </a:effectRef>
+          <a:fontRef idx="minor">
+            <a:schemeClr val="tx1"/>
+          </a:fontRef>
+        </p:style>
+      </p:cxnSp>
+      <p:sp>
+        <p:nvSpPr>
+          <p:cNvPr id="25" name="Прямоугольник 24"/>
+          <p:cNvSpPr/>
+          <p:nvPr/>
+        </p:nvSpPr>
+        <p:spPr>
+          <a:xfrm>
+            <a:off x="6143668" y="4005868"/>
+            <a:ext cx="3000364" cy="923330"/>
+          </a:xfrm>
+          <a:prstGeom prst="rect">
+            <a:avLst/>
+          </a:prstGeom>
+        </p:spPr>
+        <p:txBody>
           <a:bodyPr wrap="square">
             <a:spAutoFit/>
           </a:bodyPr>
           <a:lstStyle/>
           <a:p>
-            <a:pPr algn="ctr"/>
-            <a:r>
-              <a:rPr lang="ru-RU" sz="2000" dirty="0" smtClean="0">
+            <a:pPr algn="just"/>
+            <a:r>
+              <a:rPr lang="ru-RU" b="1" dirty="0" smtClean="0">
+                <a:latin typeface="Cambria" pitchFamily="18" charset="0"/>
+              </a:rPr>
+              <a:t>Методы класса </a:t>
+            </a:r>
+            <a:r>
+              <a:rPr lang="ru-RU" dirty="0" smtClean="0">
+                <a:latin typeface="Cambria" pitchFamily="18" charset="0"/>
+              </a:rPr>
+              <a:t>— это функции, входящие в состав класса.</a:t>
+            </a:r>
+            <a:endParaRPr lang="ru-RU" dirty="0">
+              <a:latin typeface="Cambria" pitchFamily="18" charset="0"/>
+            </a:endParaRPr>
+          </a:p>
+        </p:txBody>
+      </p:sp>
+      <p:sp>
+        <p:nvSpPr>
+          <p:cNvPr id="26" name="Прямоугольник 25"/>
+          <p:cNvSpPr/>
+          <p:nvPr/>
+        </p:nvSpPr>
+        <p:spPr>
+          <a:xfrm>
+            <a:off x="0" y="1071546"/>
+            <a:ext cx="4071934" cy="1200329"/>
+          </a:xfrm>
+          <a:prstGeom prst="rect">
+            <a:avLst/>
+          </a:prstGeom>
+        </p:spPr>
+        <p:txBody>
+          <a:bodyPr wrap="square">
+            <a:spAutoFit/>
+          </a:bodyPr>
+          <a:lstStyle/>
+          <a:p>
+            <a:pPr algn="just"/>
+            <a:r>
+              <a:rPr lang="ru-RU" b="1" dirty="0" smtClean="0">
+                <a:latin typeface="Cambria" pitchFamily="18" charset="0"/>
+              </a:rPr>
+              <a:t>Класс </a:t>
+            </a:r>
+            <a:r>
+              <a:rPr lang="ru-RU" dirty="0" smtClean="0">
+                <a:latin typeface="Cambria" pitchFamily="18" charset="0"/>
+              </a:rPr>
+              <a:t>—</a:t>
+            </a:r>
+            <a:r>
+              <a:rPr lang="ru-RU" b="1" dirty="0" smtClean="0">
+                <a:latin typeface="Cambria" pitchFamily="18" charset="0"/>
+              </a:rPr>
+              <a:t> </a:t>
+            </a:r>
+            <a:r>
+              <a:rPr lang="ru-RU" dirty="0" smtClean="0">
+                <a:latin typeface="Cambria" pitchFamily="18" charset="0"/>
+              </a:rPr>
+              <a:t>это абстракция, описывающая свойства и методы ещё не существующих объектов (пользовательский тип данных).</a:t>
+            </a:r>
+          </a:p>
+        </p:txBody>
+      </p:sp>
+      <p:cxnSp>
+        <p:nvCxnSpPr>
+          <p:cNvPr id="28" name="Прямая со стрелкой 27"/>
+          <p:cNvCxnSpPr/>
+          <p:nvPr/>
+        </p:nvCxnSpPr>
+        <p:spPr>
+          <a:xfrm rot="10800000" flipV="1">
+            <a:off x="3000364" y="3357562"/>
+            <a:ext cx="571504" cy="214314"/>
+          </a:xfrm>
+          <a:prstGeom prst="straightConnector1">
+            <a:avLst/>
+          </a:prstGeom>
+          <a:ln w="25400">
+            <a:solidFill>
+              <a:srgbClr val="FF0000"/>
+            </a:solidFill>
+            <a:tailEnd type="arrow"/>
+          </a:ln>
+        </p:spPr>
+        <p:style>
+          <a:lnRef idx="1">
+            <a:schemeClr val="accent1"/>
+          </a:lnRef>
+          <a:fillRef idx="0">
+            <a:schemeClr val="accent1"/>
+          </a:fillRef>
+          <a:effectRef idx="0">
+            <a:schemeClr val="accent1"/>
+          </a:effectRef>
+          <a:fontRef idx="minor">
+            <a:schemeClr val="tx1"/>
+          </a:fontRef>
+        </p:style>
+      </p:cxnSp>
+      <p:sp>
+        <p:nvSpPr>
+          <p:cNvPr id="31" name="Прямоугольник 30"/>
+          <p:cNvSpPr/>
+          <p:nvPr/>
+        </p:nvSpPr>
+        <p:spPr>
+          <a:xfrm>
+            <a:off x="3571868" y="2862860"/>
+            <a:ext cx="5214974" cy="923330"/>
+          </a:xfrm>
+          <a:prstGeom prst="rect">
+            <a:avLst/>
+          </a:prstGeom>
+        </p:spPr>
+        <p:txBody>
+          <a:bodyPr wrap="square">
+            <a:spAutoFit/>
+          </a:bodyPr>
+          <a:lstStyle/>
+          <a:p>
+            <a:pPr algn="just"/>
+            <a:r>
+              <a:rPr lang="ru-RU" b="1" dirty="0" smtClean="0">
+                <a:latin typeface="Cambria" pitchFamily="18" charset="0"/>
+              </a:rPr>
+              <a:t>Конструктор</a:t>
+            </a:r>
+            <a:r>
+              <a:rPr lang="ru-RU" dirty="0" smtClean="0">
+                <a:latin typeface="Cambria" pitchFamily="18" charset="0"/>
+              </a:rPr>
+              <a:t> вызывается при создании объекта класса и может использоваться для инициализации начальных значений полей.</a:t>
+            </a:r>
+          </a:p>
+        </p:txBody>
+      </p:sp>
+      <p:sp>
+        <p:nvSpPr>
+          <p:cNvPr id="15" name="Прямоугольник 14"/>
+          <p:cNvSpPr/>
+          <p:nvPr/>
+        </p:nvSpPr>
+        <p:spPr>
+          <a:xfrm>
+            <a:off x="6643702" y="5857868"/>
+            <a:ext cx="2500298" cy="1000132"/>
+          </a:xfrm>
+          <a:prstGeom prst="rect">
+            <a:avLst/>
+          </a:prstGeom>
+          <a:solidFill>
+            <a:schemeClr val="bg2"/>
+          </a:solidFill>
+          <a:ln>
+            <a:solidFill>
+              <a:schemeClr val="tx1"/>
+            </a:solidFill>
+          </a:ln>
+        </p:spPr>
+        <p:style>
+          <a:lnRef idx="2">
+            <a:schemeClr val="accent1">
+              <a:shade val="50000"/>
+            </a:schemeClr>
+          </a:lnRef>
+          <a:fillRef idx="1">
+            <a:schemeClr val="accent1"/>
+          </a:fillRef>
+          <a:effectRef idx="0">
+            <a:schemeClr val="accent1"/>
+          </a:effectRef>
+          <a:fontRef idx="minor">
+            <a:schemeClr val="lt1"/>
+          </a:fontRef>
+        </p:style>
+        <p:txBody>
+          <a:bodyPr rtlCol="0" anchor="ctr"/>
+          <a:lstStyle/>
+          <a:p>
+            <a:pPr algn="just"/>
+            <a:r>
+              <a:rPr lang="ru-RU" dirty="0" smtClean="0">
+                <a:solidFill>
+                  <a:schemeClr val="tx1"/>
+                </a:solidFill>
                 <a:latin typeface="Times New Roman" pitchFamily="18" charset="0"/>
                 <a:cs typeface="Times New Roman" pitchFamily="18" charset="0"/>
               </a:rPr>
-              <a:t>Количество входных полей зависит от задания</a:t>
-            </a:r>
-            <a:endParaRPr lang="ru-RU" sz="2000" dirty="0"/>
-          </a:p>
-        </p:txBody>
-      </p:sp>
-      <p:sp>
-        <p:nvSpPr>
-          <p:cNvPr id="23" name="Прямоугольник 22"/>
-          <p:cNvSpPr/>
-          <p:nvPr/>
-        </p:nvSpPr>
-        <p:spPr>
-          <a:xfrm>
-            <a:off x="642910" y="5643578"/>
-            <a:ext cx="3000396" cy="707886"/>
-          </a:xfrm>
-          <a:prstGeom prst="rect">
-            <a:avLst/>
-          </a:prstGeom>
-        </p:spPr>
-        <p:txBody>
-          <a:bodyPr wrap="square">
-            <a:spAutoFit/>
-          </a:bodyPr>
-          <a:lstStyle/>
-          <a:p>
-            <a:pPr algn="ctr"/>
-            <a:r>
-              <a:rPr lang="ru-RU" sz="2000" dirty="0" smtClean="0">
+              <a:t>Количество </a:t>
+            </a:r>
+            <a:r>
+              <a:rPr lang="en-US" dirty="0" smtClean="0">
+                <a:solidFill>
+                  <a:schemeClr val="tx1"/>
+                </a:solidFill>
                 <a:latin typeface="Times New Roman" pitchFamily="18" charset="0"/>
                 <a:cs typeface="Times New Roman" pitchFamily="18" charset="0"/>
               </a:rPr>
-              <a:t>Примерный шаблон интерфейса</a:t>
-            </a:r>
-            <a:endParaRPr lang="ru-RU" sz="2000" dirty="0"/>
+              <a:t>textbox </a:t>
+            </a:r>
+            <a:r>
+              <a:rPr lang="ru-RU" dirty="0" smtClean="0">
+                <a:solidFill>
+                  <a:schemeClr val="tx1"/>
+                </a:solidFill>
+                <a:latin typeface="Times New Roman" pitchFamily="18" charset="0"/>
+                <a:cs typeface="Times New Roman" pitchFamily="18" charset="0"/>
+              </a:rPr>
+              <a:t>на форме зависит от задания</a:t>
+            </a:r>
+            <a:endParaRPr lang="ru-RU" dirty="0">
+              <a:solidFill>
+                <a:schemeClr val="tx1"/>
+              </a:solidFill>
+              <a:latin typeface="Times New Roman" pitchFamily="18" charset="0"/>
+              <a:cs typeface="Times New Roman" pitchFamily="18" charset="0"/>
+            </a:endParaRPr>
           </a:p>
         </p:txBody>
       </p:sp>
@@ -4196,24 +4357,96 @@
       </p:grpSpPr>
       <p:sp>
         <p:nvSpPr>
-          <p:cNvPr id="27" name="Прямоугольник 26"/>
-          <p:cNvSpPr/>
+          <p:cNvPr id="2" name="Заголовок 1"/>
+          <p:cNvSpPr>
+            <a:spLocks noGrp="1"/>
+          </p:cNvSpPr>
+          <p:nvPr>
+            <p:ph type="title"/>
+          </p:nvPr>
+        </p:nvSpPr>
+        <p:spPr>
+          <a:xfrm>
+            <a:off x="-1714544" y="0"/>
+            <a:ext cx="12487420" cy="1143000"/>
+          </a:xfrm>
+        </p:spPr>
+        <p:txBody>
+          <a:bodyPr>
+            <a:normAutofit fontScale="90000"/>
+          </a:bodyPr>
+          <a:lstStyle/>
+          <a:p>
+            <a:r>
+              <a:rPr lang="ru-RU" b="1" dirty="0" smtClean="0"/>
+              <a:t>Задание </a:t>
+            </a:r>
+            <a:r>
+              <a:rPr lang="en-US" b="1" dirty="0" smtClean="0"/>
+              <a:t>1 </a:t>
+            </a:r>
+            <a:r>
+              <a:rPr lang="ru-RU" b="1" dirty="0" smtClean="0"/>
+              <a:t>Решение с помощью ООП</a:t>
+            </a:r>
+            <a:br>
+              <a:rPr lang="ru-RU" b="1" dirty="0" smtClean="0"/>
+            </a:br>
+            <a:endParaRPr lang="ru-RU" dirty="0"/>
+          </a:p>
+        </p:txBody>
+      </p:sp>
+      <p:pic>
+        <p:nvPicPr>
+          <p:cNvPr id="3075" name="Picture 3"/>
+          <p:cNvPicPr>
+            <a:picLocks noChangeAspect="1" noChangeArrowheads="1"/>
+          </p:cNvPicPr>
           <p:nvPr/>
-        </p:nvSpPr>
-        <p:spPr>
-          <a:xfrm>
-            <a:off x="0" y="1142984"/>
-            <a:ext cx="4071934" cy="1071570"/>
+        </p:nvPicPr>
+        <p:blipFill>
+          <a:blip r:embed="rId2"/>
+          <a:srcRect/>
+          <a:stretch>
+            <a:fillRect/>
+          </a:stretch>
+        </p:blipFill>
+        <p:spPr bwMode="auto">
+          <a:xfrm>
+            <a:off x="0" y="1428736"/>
+            <a:ext cx="5000628" cy="2892650"/>
           </a:xfrm>
           <a:prstGeom prst="rect">
             <a:avLst/>
           </a:prstGeom>
-          <a:solidFill>
-            <a:schemeClr val="bg2"/>
-          </a:solidFill>
+          <a:noFill/>
+          <a:ln w="9525">
+            <a:noFill/>
+            <a:miter lim="800000"/>
+            <a:headEnd/>
+            <a:tailEnd/>
+          </a:ln>
+          <a:effectLst/>
+        </p:spPr>
+      </p:pic>
+      <p:sp>
+        <p:nvSpPr>
+          <p:cNvPr id="33" name="Скругленный прямоугольник 32"/>
+          <p:cNvSpPr/>
+          <p:nvPr/>
+        </p:nvSpPr>
+        <p:spPr>
+          <a:xfrm>
+            <a:off x="0" y="1428736"/>
+            <a:ext cx="3571868" cy="357190"/>
+          </a:xfrm>
+          <a:prstGeom prst="roundRect">
+            <a:avLst/>
+          </a:prstGeom>
+          <a:noFill/>
           <a:ln>
             <a:solidFill>
-              <a:schemeClr val="tx1"/>
+              <a:srgbClr val="FF0000"/>
             </a:solidFill>
           </a:ln>
         </p:spPr>
@@ -4242,97 +4475,86 @@
           </a:p>
         </p:txBody>
       </p:sp>
-      <p:sp>
-        <p:nvSpPr>
-          <p:cNvPr id="2" name="Заголовок 1"/>
-          <p:cNvSpPr>
-            <a:spLocks noGrp="1"/>
-          </p:cNvSpPr>
-          <p:nvPr>
-            <p:ph type="title"/>
-          </p:nvPr>
-        </p:nvSpPr>
+      <p:cxnSp>
+        <p:nvCxnSpPr>
+          <p:cNvPr id="34" name="Прямая со стрелкой 33"/>
+          <p:cNvCxnSpPr>
+            <a:stCxn id="43" idx="2"/>
+            <a:endCxn id="40" idx="3"/>
+          </p:cNvCxnSpPr>
+          <p:nvPr/>
+        </p:nvCxnSpPr>
         <p:spPr>
-          <a:xfrm>
-            <a:off x="414366" y="214290"/>
-            <a:ext cx="8229600" cy="1143000"/>
-          </a:xfrm>
-        </p:spPr>
-        <p:txBody>
-          <a:bodyPr>
-            <a:normAutofit fontScale="90000"/>
-          </a:bodyPr>
-          <a:lstStyle/>
-          <a:p>
-            <a:r>
-              <a:rPr lang="ru-RU" b="1" dirty="0" smtClean="0"/>
-              <a:t>Задание </a:t>
-            </a:r>
-            <a:r>
-              <a:rPr lang="en-US" b="1" dirty="0" smtClean="0"/>
-              <a:t>1</a:t>
-            </a:r>
-            <a:r>
-              <a:rPr lang="ru-RU" b="1" dirty="0" smtClean="0"/>
-              <a:t/>
-            </a:r>
-            <a:br>
-              <a:rPr lang="ru-RU" b="1" dirty="0" smtClean="0"/>
-            </a:br>
-            <a:r>
-              <a:rPr lang="ru-RU" b="1" dirty="0" smtClean="0"/>
-              <a:t>Решение с помощью ООП</a:t>
-            </a:r>
-            <a:br>
-              <a:rPr lang="ru-RU" b="1" dirty="0" smtClean="0"/>
-            </a:br>
-            <a:endParaRPr lang="ru-RU" dirty="0"/>
-          </a:p>
-        </p:txBody>
-      </p:sp>
-      <p:pic>
-        <p:nvPicPr>
-          <p:cNvPr id="3074" name="Picture 2"/>
-          <p:cNvPicPr>
-            <a:picLocks noChangeAspect="1" noChangeArrowheads="1"/>
-          </p:cNvPicPr>
+          <a:xfrm rot="5400000">
+            <a:off x="5779380" y="1421686"/>
+            <a:ext cx="907092" cy="2178843"/>
+          </a:xfrm>
+          <a:prstGeom prst="straightConnector1">
+            <a:avLst/>
+          </a:prstGeom>
+          <a:ln w="25400">
+            <a:solidFill>
+              <a:srgbClr val="FF0000"/>
+            </a:solidFill>
+            <a:tailEnd type="arrow"/>
+          </a:ln>
+        </p:spPr>
+        <p:style>
+          <a:lnRef idx="1">
+            <a:schemeClr val="accent1"/>
+          </a:lnRef>
+          <a:fillRef idx="0">
+            <a:schemeClr val="accent1"/>
+          </a:fillRef>
+          <a:effectRef idx="0">
+            <a:schemeClr val="accent1"/>
+          </a:effectRef>
+          <a:fontRef idx="minor">
+            <a:schemeClr val="tx1"/>
+          </a:fontRef>
+        </p:style>
+      </p:cxnSp>
+      <p:sp>
+        <p:nvSpPr>
+          <p:cNvPr id="39" name="Прямоугольник 38"/>
+          <p:cNvSpPr/>
           <p:nvPr/>
-        </p:nvPicPr>
-        <p:blipFill>
-          <a:blip r:embed="rId2"/>
-          <a:srcRect/>
-          <a:stretch>
-            <a:fillRect/>
-          </a:stretch>
-        </p:blipFill>
-        <p:spPr bwMode="auto">
-          <a:xfrm>
-            <a:off x="357158" y="2390775"/>
-            <a:ext cx="5591175" cy="4467225"/>
+        </p:nvSpPr>
+        <p:spPr>
+          <a:xfrm>
+            <a:off x="1571604" y="428604"/>
+            <a:ext cx="4572000" cy="369332"/>
           </a:xfrm>
           <a:prstGeom prst="rect">
             <a:avLst/>
           </a:prstGeom>
-          <a:noFill/>
-          <a:ln w="9525">
-            <a:noFill/>
-            <a:miter lim="800000"/>
-            <a:headEnd/>
-            <a:tailEnd/>
-          </a:ln>
-          <a:effectLst/>
-        </p:spPr>
-      </p:pic>
-      <p:sp>
-        <p:nvSpPr>
-          <p:cNvPr id="11" name="Скругленный прямоугольник 10"/>
+        </p:spPr>
+        <p:txBody>
+          <a:bodyPr>
+            <a:spAutoFit/>
+          </a:bodyPr>
+          <a:lstStyle/>
+          <a:p>
+            <a:pPr algn="just"/>
+            <a:r>
+              <a:rPr lang="ru-RU" dirty="0" smtClean="0">
+                <a:latin typeface="Cambria" pitchFamily="18" charset="0"/>
+              </a:rPr>
+              <a:t>Инициализация объекта класса</a:t>
+            </a:r>
+          </a:p>
+        </p:txBody>
+      </p:sp>
+      <p:sp>
+        <p:nvSpPr>
+          <p:cNvPr id="40" name="Скругленный прямоугольник 39"/>
           <p:cNvSpPr/>
           <p:nvPr/>
         </p:nvSpPr>
         <p:spPr>
           <a:xfrm>
-            <a:off x="642910" y="2747965"/>
-            <a:ext cx="2143140" cy="571504"/>
+            <a:off x="642910" y="2428868"/>
+            <a:ext cx="4500594" cy="1071570"/>
           </a:xfrm>
           <a:prstGeom prst="roundRect">
             <a:avLst/>
@@ -4369,18 +4591,50 @@
           </a:p>
         </p:txBody>
       </p:sp>
+      <p:sp>
+        <p:nvSpPr>
+          <p:cNvPr id="43" name="Прямоугольник 42"/>
+          <p:cNvSpPr/>
+          <p:nvPr/>
+        </p:nvSpPr>
+        <p:spPr>
+          <a:xfrm>
+            <a:off x="5500694" y="857232"/>
+            <a:ext cx="3643306" cy="1200329"/>
+          </a:xfrm>
+          <a:prstGeom prst="rect">
+            <a:avLst/>
+          </a:prstGeom>
+        </p:spPr>
+        <p:txBody>
+          <a:bodyPr wrap="square">
+            <a:spAutoFit/>
+          </a:bodyPr>
+          <a:lstStyle/>
+          <a:p>
+            <a:pPr algn="just"/>
+            <a:r>
+              <a:rPr lang="ru-RU" dirty="0" smtClean="0">
+                <a:latin typeface="Cambria" pitchFamily="18" charset="0"/>
+              </a:rPr>
+              <a:t>Запись информации в поля класса, вызов методов класса, отображение с помощью интерфейса полей класса</a:t>
+            </a:r>
+          </a:p>
+        </p:txBody>
+      </p:sp>
       <p:cxnSp>
         <p:nvCxnSpPr>
-          <p:cNvPr id="14" name="Прямая со стрелкой 13"/>
+          <p:cNvPr id="44" name="Прямая со стрелкой 43"/>
           <p:cNvCxnSpPr>
-            <a:endCxn id="11" idx="3"/>
+            <a:stCxn id="39" idx="2"/>
+            <a:endCxn id="33" idx="0"/>
           </p:cNvCxnSpPr>
           <p:nvPr/>
         </p:nvCxnSpPr>
         <p:spPr>
-          <a:xfrm rot="10800000" flipV="1">
-            <a:off x="2786050" y="2462213"/>
-            <a:ext cx="3357586" cy="571504"/>
+          <a:xfrm rot="5400000">
+            <a:off x="2506369" y="77501"/>
+            <a:ext cx="630800" cy="2071670"/>
           </a:xfrm>
           <a:prstGeom prst="straightConnector1">
             <a:avLst/>
@@ -4409,285 +4663,249 @@
       </p:cxnSp>
       <p:sp>
         <p:nvSpPr>
-          <p:cNvPr id="21" name="Скругленный прямоугольник 20"/>
+          <p:cNvPr id="13" name="Прямоугольник 12"/>
           <p:cNvSpPr/>
           <p:nvPr/>
         </p:nvSpPr>
         <p:spPr>
           <a:xfrm>
-            <a:off x="642910" y="3890973"/>
-            <a:ext cx="5429288" cy="2643206"/>
-          </a:xfrm>
-          <a:prstGeom prst="roundRect">
+            <a:off x="0" y="4214818"/>
+            <a:ext cx="5072066" cy="2062103"/>
+          </a:xfrm>
+          <a:prstGeom prst="rect">
+            <a:avLst/>
+          </a:prstGeom>
+          <a:solidFill>
+            <a:schemeClr val="accent4">
+              <a:lumMod val="20000"/>
+              <a:lumOff val="80000"/>
+            </a:schemeClr>
+          </a:solidFill>
+        </p:spPr>
+        <p:txBody>
+          <a:bodyPr wrap="square">
+            <a:spAutoFit/>
+          </a:bodyPr>
+          <a:lstStyle/>
+          <a:p>
+            <a:pPr algn="just"/>
+            <a:r>
+              <a:rPr lang="ru-RU" sz="1600" b="1" dirty="0" smtClean="0">
+                <a:solidFill>
+                  <a:srgbClr val="002060"/>
+                </a:solidFill>
+                <a:latin typeface="Times New Roman" pitchFamily="18" charset="0"/>
+                <a:cs typeface="Times New Roman" pitchFamily="18" charset="0"/>
+              </a:rPr>
+              <a:t>Но лучше все поля делать приватными, потому что внешний код не должен напрямую влиять на внутреннее состояние объекта. Для этого ставьте модификатор </a:t>
+            </a:r>
+            <a:r>
+              <a:rPr lang="ru-RU" sz="1600" b="1" u="sng" dirty="0" err="1" smtClean="0">
+                <a:solidFill>
+                  <a:srgbClr val="002060"/>
+                </a:solidFill>
+                <a:latin typeface="Times New Roman" pitchFamily="18" charset="0"/>
+                <a:cs typeface="Times New Roman" pitchFamily="18" charset="0"/>
+              </a:rPr>
+              <a:t>private</a:t>
+            </a:r>
+            <a:r>
+              <a:rPr lang="ru-RU" sz="1600" b="1" dirty="0" smtClean="0">
+                <a:solidFill>
+                  <a:srgbClr val="002060"/>
+                </a:solidFill>
+                <a:latin typeface="Times New Roman" pitchFamily="18" charset="0"/>
+                <a:cs typeface="Times New Roman" pitchFamily="18" charset="0"/>
+              </a:rPr>
+              <a:t> и создайте свойства для его </a:t>
+            </a:r>
+            <a:r>
+              <a:rPr lang="ru-RU" sz="1600" b="1" dirty="0" smtClean="0">
+                <a:solidFill>
+                  <a:srgbClr val="002060"/>
+                </a:solidFill>
+                <a:latin typeface="Times New Roman" pitchFamily="18" charset="0"/>
+                <a:cs typeface="Times New Roman" pitchFamily="18" charset="0"/>
+              </a:rPr>
+              <a:t>обработки</a:t>
+            </a:r>
+            <a:r>
+              <a:rPr lang="en-US" sz="1600" b="1" dirty="0" smtClean="0">
+                <a:solidFill>
+                  <a:srgbClr val="002060"/>
+                </a:solidFill>
+                <a:latin typeface="Times New Roman" pitchFamily="18" charset="0"/>
+                <a:cs typeface="Times New Roman" pitchFamily="18" charset="0"/>
+              </a:rPr>
+              <a:t>. </a:t>
+            </a:r>
+            <a:r>
+              <a:rPr lang="ru-RU" sz="1600" b="1" dirty="0" smtClean="0">
+                <a:solidFill>
+                  <a:srgbClr val="002060"/>
+                </a:solidFill>
+                <a:latin typeface="Times New Roman" pitchFamily="18" charset="0"/>
+                <a:cs typeface="Times New Roman" pitchFamily="18" charset="0"/>
+              </a:rPr>
+              <a:t>Это один из основных способов обеспечения </a:t>
+            </a:r>
+            <a:r>
+              <a:rPr lang="ru-RU" sz="1600" b="1" dirty="0" err="1" smtClean="0">
+                <a:solidFill>
+                  <a:srgbClr val="002060"/>
+                </a:solidFill>
+                <a:latin typeface="Times New Roman" pitchFamily="18" charset="0"/>
+                <a:cs typeface="Times New Roman" pitchFamily="18" charset="0"/>
+              </a:rPr>
+              <a:t>инкапусляции</a:t>
+            </a:r>
+            <a:r>
+              <a:rPr lang="ru-RU" sz="1600" b="1" dirty="0" smtClean="0">
+                <a:solidFill>
+                  <a:srgbClr val="002060"/>
+                </a:solidFill>
+                <a:latin typeface="Times New Roman" pitchFamily="18" charset="0"/>
+                <a:cs typeface="Times New Roman" pitchFamily="18" charset="0"/>
+              </a:rPr>
+              <a:t> (где снаружи видны </a:t>
+            </a:r>
+            <a:r>
+              <a:rPr lang="ru-RU" sz="1600" b="1" dirty="0" smtClean="0">
+                <a:solidFill>
+                  <a:srgbClr val="002060"/>
+                </a:solidFill>
+                <a:latin typeface="Times New Roman" pitchFamily="18" charset="0"/>
+                <a:cs typeface="Times New Roman" pitchFamily="18" charset="0"/>
+              </a:rPr>
+              <a:t/>
+            </a:r>
+            <a:br>
+              <a:rPr lang="ru-RU" sz="1600" b="1" dirty="0" smtClean="0">
+                <a:solidFill>
+                  <a:srgbClr val="002060"/>
+                </a:solidFill>
+                <a:latin typeface="Times New Roman" pitchFamily="18" charset="0"/>
+                <a:cs typeface="Times New Roman" pitchFamily="18" charset="0"/>
+              </a:rPr>
+            </a:br>
+            <a:r>
+              <a:rPr lang="ru-RU" sz="1600" b="1" dirty="0" smtClean="0">
+                <a:solidFill>
+                  <a:srgbClr val="002060"/>
+                </a:solidFill>
+                <a:latin typeface="Times New Roman" pitchFamily="18" charset="0"/>
+                <a:cs typeface="Times New Roman" pitchFamily="18" charset="0"/>
+              </a:rPr>
+              <a:t>только</a:t>
+            </a:r>
+            <a:r>
+              <a:rPr lang="ru-RU" sz="1600" b="1" dirty="0" smtClean="0">
+                <a:solidFill>
+                  <a:srgbClr val="002060"/>
+                </a:solidFill>
+                <a:latin typeface="Times New Roman" pitchFamily="18" charset="0"/>
+                <a:cs typeface="Times New Roman" pitchFamily="18" charset="0"/>
+              </a:rPr>
+              <a:t> </a:t>
+            </a:r>
+            <a:r>
+              <a:rPr lang="ru-RU" sz="1600" b="1" dirty="0" smtClean="0">
+                <a:solidFill>
+                  <a:srgbClr val="002060"/>
+                </a:solidFill>
+                <a:latin typeface="Times New Roman" pitchFamily="18" charset="0"/>
+                <a:cs typeface="Times New Roman" pitchFamily="18" charset="0"/>
+              </a:rPr>
+              <a:t>кнопки</a:t>
+            </a:r>
+            <a:r>
+              <a:rPr lang="ru-RU" sz="1600" b="1" dirty="0" smtClean="0">
+                <a:solidFill>
+                  <a:srgbClr val="002060"/>
+                </a:solidFill>
+                <a:latin typeface="Times New Roman" pitchFamily="18" charset="0"/>
+                <a:cs typeface="Times New Roman" pitchFamily="18" charset="0"/>
+              </a:rPr>
+              <a:t> управления, а внутренности скрыты и защищены).</a:t>
+            </a:r>
+            <a:endParaRPr lang="ru-RU" sz="1600" b="1" dirty="0">
+              <a:solidFill>
+                <a:srgbClr val="002060"/>
+              </a:solidFill>
+              <a:latin typeface="Times New Roman" pitchFamily="18" charset="0"/>
+              <a:cs typeface="Times New Roman" pitchFamily="18" charset="0"/>
+            </a:endParaRPr>
+          </a:p>
+        </p:txBody>
+      </p:sp>
+      <p:pic>
+        <p:nvPicPr>
+          <p:cNvPr id="1028" name="Picture 4"/>
+          <p:cNvPicPr>
+            <a:picLocks noChangeAspect="1" noChangeArrowheads="1"/>
+          </p:cNvPicPr>
+          <p:nvPr/>
+        </p:nvPicPr>
+        <p:blipFill>
+          <a:blip r:embed="rId3"/>
+          <a:srcRect/>
+          <a:stretch>
+            <a:fillRect/>
+          </a:stretch>
+        </p:blipFill>
+        <p:spPr bwMode="auto">
+          <a:xfrm>
+            <a:off x="500034" y="6276975"/>
+            <a:ext cx="3143250" cy="581025"/>
+          </a:xfrm>
+          <a:prstGeom prst="rect">
             <a:avLst/>
           </a:prstGeom>
           <a:noFill/>
-          <a:ln>
-            <a:solidFill>
-              <a:srgbClr val="FF0000"/>
-            </a:solidFill>
+          <a:ln w="9525">
+            <a:noFill/>
+            <a:miter lim="800000"/>
+            <a:headEnd/>
+            <a:tailEnd/>
           </a:ln>
-        </p:spPr>
-        <p:style>
-          <a:lnRef idx="2">
-            <a:schemeClr val="accent1">
-              <a:shade val="50000"/>
-            </a:schemeClr>
-          </a:lnRef>
-          <a:fillRef idx="1">
-            <a:schemeClr val="accent1"/>
-          </a:fillRef>
-          <a:effectRef idx="0">
-            <a:schemeClr val="accent1"/>
-          </a:effectRef>
-          <a:fontRef idx="minor">
-            <a:schemeClr val="lt1"/>
-          </a:fontRef>
-        </p:style>
-        <p:txBody>
-          <a:bodyPr rtlCol="0" anchor="ctr"/>
-          <a:lstStyle/>
-          <a:p>
-            <a:pPr algn="ctr"/>
-            <a:endParaRPr lang="ru-RU"/>
-          </a:p>
-        </p:txBody>
-      </p:sp>
-      <p:sp>
-        <p:nvSpPr>
-          <p:cNvPr id="22" name="Прямоугольник 21"/>
-          <p:cNvSpPr/>
+          <a:effectLst/>
+        </p:spPr>
+      </p:pic>
+      <p:pic>
+        <p:nvPicPr>
+          <p:cNvPr id="1029" name="Picture 5"/>
+          <p:cNvPicPr>
+            <a:picLocks noChangeAspect="1" noChangeArrowheads="1"/>
+          </p:cNvPicPr>
           <p:nvPr/>
-        </p:nvSpPr>
-        <p:spPr>
-          <a:xfrm>
-            <a:off x="4572000" y="1747833"/>
-            <a:ext cx="4572000" cy="646331"/>
+        </p:nvPicPr>
+        <p:blipFill>
+          <a:blip r:embed="rId4"/>
+          <a:srcRect/>
+          <a:stretch>
+            <a:fillRect/>
+          </a:stretch>
+        </p:blipFill>
+        <p:spPr bwMode="auto">
+          <a:xfrm>
+            <a:off x="5047068" y="4214818"/>
+            <a:ext cx="4096932" cy="2643182"/>
           </a:xfrm>
           <a:prstGeom prst="rect">
             <a:avLst/>
           </a:prstGeom>
-        </p:spPr>
-        <p:txBody>
-          <a:bodyPr>
-            <a:spAutoFit/>
-          </a:bodyPr>
-          <a:lstStyle/>
-          <a:p>
-            <a:pPr algn="just"/>
-            <a:r>
-              <a:rPr lang="ru-RU" b="1" dirty="0" smtClean="0">
-                <a:latin typeface="Cambria" pitchFamily="18" charset="0"/>
-              </a:rPr>
-              <a:t>Поля класса</a:t>
-            </a:r>
-            <a:r>
-              <a:rPr lang="ru-RU" dirty="0" smtClean="0">
-                <a:latin typeface="Cambria" pitchFamily="18" charset="0"/>
-              </a:rPr>
-              <a:t> — это данные, содержащиеся внутри класса.</a:t>
-            </a:r>
-          </a:p>
-        </p:txBody>
-      </p:sp>
-      <p:cxnSp>
-        <p:nvCxnSpPr>
-          <p:cNvPr id="23" name="Прямая со стрелкой 22"/>
-          <p:cNvCxnSpPr/>
-          <p:nvPr/>
-        </p:nvCxnSpPr>
-        <p:spPr>
-          <a:xfrm rot="10800000" flipV="1">
-            <a:off x="6072198" y="4929198"/>
-            <a:ext cx="571504" cy="390534"/>
-          </a:xfrm>
-          <a:prstGeom prst="straightConnector1">
-            <a:avLst/>
-          </a:prstGeom>
-          <a:ln w="25400">
+          <a:noFill/>
+          <a:ln w="9525">
             <a:solidFill>
-              <a:srgbClr val="FF0000"/>
+              <a:schemeClr val="tx1"/>
             </a:solidFill>
-            <a:tailEnd type="arrow"/>
+            <a:miter lim="800000"/>
+            <a:headEnd/>
+            <a:tailEnd/>
           </a:ln>
-        </p:spPr>
-        <p:style>
-          <a:lnRef idx="1">
-            <a:schemeClr val="accent1"/>
-          </a:lnRef>
-          <a:fillRef idx="0">
-            <a:schemeClr val="accent1"/>
-          </a:fillRef>
-          <a:effectRef idx="0">
-            <a:schemeClr val="accent1"/>
-          </a:effectRef>
-          <a:fontRef idx="minor">
-            <a:schemeClr val="tx1"/>
-          </a:fontRef>
-        </p:style>
-      </p:cxnSp>
-      <p:sp>
-        <p:nvSpPr>
-          <p:cNvPr id="25" name="Прямоугольник 24"/>
-          <p:cNvSpPr/>
-          <p:nvPr/>
-        </p:nvSpPr>
-        <p:spPr>
-          <a:xfrm>
-            <a:off x="6143668" y="4005868"/>
-            <a:ext cx="3000364" cy="923330"/>
-          </a:xfrm>
-          <a:prstGeom prst="rect">
-            <a:avLst/>
-          </a:prstGeom>
-        </p:spPr>
-        <p:txBody>
-          <a:bodyPr wrap="square">
-            <a:spAutoFit/>
-          </a:bodyPr>
-          <a:lstStyle/>
-          <a:p>
-            <a:pPr algn="just"/>
-            <a:r>
-              <a:rPr lang="ru-RU" b="1" dirty="0" smtClean="0">
-                <a:latin typeface="Cambria" pitchFamily="18" charset="0"/>
-              </a:rPr>
-              <a:t>Методы класса </a:t>
-            </a:r>
-            <a:r>
-              <a:rPr lang="ru-RU" dirty="0" smtClean="0">
-                <a:latin typeface="Cambria" pitchFamily="18" charset="0"/>
-              </a:rPr>
-              <a:t>— это функции, входящие в состав класса.</a:t>
-            </a:r>
-            <a:endParaRPr lang="ru-RU" dirty="0">
-              <a:latin typeface="Cambria" pitchFamily="18" charset="0"/>
-            </a:endParaRPr>
-          </a:p>
-        </p:txBody>
-      </p:sp>
-      <p:sp>
-        <p:nvSpPr>
-          <p:cNvPr id="26" name="Прямоугольник 25"/>
-          <p:cNvSpPr/>
-          <p:nvPr/>
-        </p:nvSpPr>
-        <p:spPr>
-          <a:xfrm>
-            <a:off x="0" y="1071546"/>
-            <a:ext cx="4071934" cy="1200329"/>
-          </a:xfrm>
-          <a:prstGeom prst="rect">
-            <a:avLst/>
-          </a:prstGeom>
-        </p:spPr>
-        <p:txBody>
-          <a:bodyPr wrap="square">
-            <a:spAutoFit/>
-          </a:bodyPr>
-          <a:lstStyle/>
-          <a:p>
-            <a:pPr algn="just"/>
-            <a:r>
-              <a:rPr lang="ru-RU" b="1" dirty="0" smtClean="0">
-                <a:latin typeface="Cambria" pitchFamily="18" charset="0"/>
-              </a:rPr>
-              <a:t>Класс </a:t>
-            </a:r>
-            <a:r>
-              <a:rPr lang="ru-RU" dirty="0" smtClean="0">
-                <a:latin typeface="Cambria" pitchFamily="18" charset="0"/>
-              </a:rPr>
-              <a:t>—</a:t>
-            </a:r>
-            <a:r>
-              <a:rPr lang="ru-RU" b="1" dirty="0" smtClean="0">
-                <a:latin typeface="Cambria" pitchFamily="18" charset="0"/>
-              </a:rPr>
-              <a:t> </a:t>
-            </a:r>
-            <a:r>
-              <a:rPr lang="ru-RU" dirty="0" smtClean="0">
-                <a:latin typeface="Cambria" pitchFamily="18" charset="0"/>
-              </a:rPr>
-              <a:t>это абстракция, описывающая свойства и методы ещё не существующих объектов (пользовательский тип данных).</a:t>
-            </a:r>
-          </a:p>
-        </p:txBody>
-      </p:sp>
-      <p:cxnSp>
-        <p:nvCxnSpPr>
-          <p:cNvPr id="28" name="Прямая со стрелкой 27"/>
-          <p:cNvCxnSpPr/>
-          <p:nvPr/>
-        </p:nvCxnSpPr>
-        <p:spPr>
-          <a:xfrm rot="10800000" flipV="1">
-            <a:off x="3000364" y="3357562"/>
-            <a:ext cx="571504" cy="214314"/>
-          </a:xfrm>
-          <a:prstGeom prst="straightConnector1">
-            <a:avLst/>
-          </a:prstGeom>
-          <a:ln w="25400">
-            <a:solidFill>
-              <a:srgbClr val="FF0000"/>
-            </a:solidFill>
-            <a:tailEnd type="arrow"/>
-          </a:ln>
-        </p:spPr>
-        <p:style>
-          <a:lnRef idx="1">
-            <a:schemeClr val="accent1"/>
-          </a:lnRef>
-          <a:fillRef idx="0">
-            <a:schemeClr val="accent1"/>
-          </a:fillRef>
-          <a:effectRef idx="0">
-            <a:schemeClr val="accent1"/>
-          </a:effectRef>
-          <a:fontRef idx="minor">
-            <a:schemeClr val="tx1"/>
-          </a:fontRef>
-        </p:style>
-      </p:cxnSp>
-      <p:sp>
-        <p:nvSpPr>
-          <p:cNvPr id="31" name="Прямоугольник 30"/>
-          <p:cNvSpPr/>
-          <p:nvPr/>
-        </p:nvSpPr>
-        <p:spPr>
-          <a:xfrm>
-            <a:off x="3571868" y="2862860"/>
-            <a:ext cx="5214974" cy="923330"/>
-          </a:xfrm>
-          <a:prstGeom prst="rect">
-            <a:avLst/>
-          </a:prstGeom>
-        </p:spPr>
-        <p:txBody>
-          <a:bodyPr wrap="square">
-            <a:spAutoFit/>
-          </a:bodyPr>
-          <a:lstStyle/>
-          <a:p>
-            <a:pPr algn="just"/>
-            <a:r>
-              <a:rPr lang="ru-RU" b="1" dirty="0" smtClean="0">
-                <a:latin typeface="Cambria" pitchFamily="18" charset="0"/>
-              </a:rPr>
-              <a:t>Конструктор</a:t>
-            </a:r>
-            <a:r>
-              <a:rPr lang="ru-RU" dirty="0" smtClean="0">
-                <a:latin typeface="Cambria" pitchFamily="18" charset="0"/>
-              </a:rPr>
-              <a:t> вызывается при создании объекта класса и может использоваться для инициализации начальных значений полей.</a:t>
-            </a:r>
-          </a:p>
-        </p:txBody>
-      </p:sp>
+          <a:effectLst/>
+        </p:spPr>
+      </p:pic>
     </p:spTree>
   </p:cSld>
   <p:clrMapOvr>
@@ -4722,55 +4940,116 @@
       </p:grpSpPr>
       <p:sp>
         <p:nvSpPr>
-          <p:cNvPr id="2" name="Заголовок 1"/>
-          <p:cNvSpPr>
-            <a:spLocks noGrp="1"/>
-          </p:cNvSpPr>
-          <p:nvPr>
-            <p:ph type="title"/>
-          </p:nvPr>
+          <p:cNvPr id="3" name="Прямоугольник 2"/>
+          <p:cNvSpPr/>
+          <p:nvPr/>
         </p:nvSpPr>
         <p:spPr>
           <a:xfrm>
-            <a:off x="414366" y="214290"/>
-            <a:ext cx="8229600" cy="1143000"/>
-          </a:xfrm>
-        </p:spPr>
-        <p:txBody>
-          <a:bodyPr>
-            <a:normAutofit fontScale="90000"/>
+            <a:off x="0" y="0"/>
+            <a:ext cx="9144000" cy="2677656"/>
+          </a:xfrm>
+          <a:prstGeom prst="rect">
+            <a:avLst/>
+          </a:prstGeom>
+        </p:spPr>
+        <p:txBody>
+          <a:bodyPr wrap="square">
+            <a:spAutoFit/>
           </a:bodyPr>
           <a:lstStyle/>
           <a:p>
-            <a:r>
-              <a:rPr lang="ru-RU" b="1" dirty="0" smtClean="0"/>
-              <a:t>Задание </a:t>
-            </a:r>
-            <a:r>
-              <a:rPr lang="en-US" b="1" dirty="0" smtClean="0"/>
-              <a:t>1</a:t>
-            </a:r>
-            <a:r>
-              <a:rPr lang="ru-RU" b="1" dirty="0" smtClean="0"/>
-              <a:t/>
-            </a:r>
-            <a:br>
-              <a:rPr lang="ru-RU" b="1" dirty="0" smtClean="0"/>
-            </a:br>
-            <a:r>
-              <a:rPr lang="ru-RU" b="1" dirty="0" smtClean="0"/>
-              <a:t>Решение с помощью ООП</a:t>
-            </a:r>
-            <a:br>
-              <a:rPr lang="ru-RU" b="1" dirty="0" smtClean="0"/>
-            </a:br>
-            <a:endParaRPr lang="ru-RU" dirty="0"/>
+            <a:pPr algn="just"/>
+            <a:r>
+              <a:rPr lang="ru-RU" sz="2400" b="1" dirty="0" smtClean="0">
+                <a:latin typeface="Times New Roman" pitchFamily="18" charset="0"/>
+                <a:cs typeface="Times New Roman" pitchFamily="18" charset="0"/>
+              </a:rPr>
+              <a:t>Свойство</a:t>
+            </a:r>
+            <a:r>
+              <a:rPr lang="ru-RU" sz="2400" dirty="0" smtClean="0">
+                <a:latin typeface="Times New Roman" pitchFamily="18" charset="0"/>
+                <a:cs typeface="Times New Roman" pitchFamily="18" charset="0"/>
+              </a:rPr>
+              <a:t> — это специальный механизм языка C#, который имитирует поле, но на самом деле представляет собой пару методов (геттер и сеттер), скрытых за единым синтаксисом.</a:t>
+            </a:r>
+            <a:endParaRPr lang="en-US" sz="2400" dirty="0" smtClean="0">
+              <a:latin typeface="Times New Roman" pitchFamily="18" charset="0"/>
+              <a:cs typeface="Times New Roman" pitchFamily="18" charset="0"/>
+            </a:endParaRPr>
+          </a:p>
+          <a:p>
+            <a:pPr algn="just"/>
+            <a:r>
+              <a:rPr lang="ru-RU" sz="2400" dirty="0" err="1" smtClean="0">
+                <a:latin typeface="Times New Roman" pitchFamily="18" charset="0"/>
+                <a:cs typeface="Times New Roman" pitchFamily="18" charset="0"/>
+              </a:rPr>
+              <a:t>get‑блок</a:t>
+            </a:r>
+            <a:r>
+              <a:rPr lang="ru-RU" sz="2400" dirty="0" smtClean="0">
+                <a:latin typeface="Times New Roman" pitchFamily="18" charset="0"/>
+                <a:cs typeface="Times New Roman" pitchFamily="18" charset="0"/>
+              </a:rPr>
+              <a:t> (геттер) — выполняется при чтении значения. Должен вернуть значение через </a:t>
+            </a:r>
+            <a:r>
+              <a:rPr lang="ru-RU" sz="2400" dirty="0" err="1" smtClean="0">
+                <a:latin typeface="Times New Roman" pitchFamily="18" charset="0"/>
+                <a:cs typeface="Times New Roman" pitchFamily="18" charset="0"/>
+              </a:rPr>
+              <a:t>return</a:t>
+            </a:r>
+            <a:r>
+              <a:rPr lang="ru-RU" sz="2400" dirty="0" smtClean="0">
+                <a:latin typeface="Times New Roman" pitchFamily="18" charset="0"/>
+                <a:cs typeface="Times New Roman" pitchFamily="18" charset="0"/>
+              </a:rPr>
+              <a:t>.</a:t>
+            </a:r>
+          </a:p>
+          <a:p>
+            <a:pPr algn="just"/>
+            <a:r>
+              <a:rPr lang="ru-RU" sz="2400" dirty="0" err="1" smtClean="0">
+                <a:latin typeface="Times New Roman" pitchFamily="18" charset="0"/>
+                <a:cs typeface="Times New Roman" pitchFamily="18" charset="0"/>
+              </a:rPr>
+              <a:t>set‑блок</a:t>
+            </a:r>
+            <a:r>
+              <a:rPr lang="ru-RU" sz="2400" dirty="0" smtClean="0">
+                <a:latin typeface="Times New Roman" pitchFamily="18" charset="0"/>
+                <a:cs typeface="Times New Roman" pitchFamily="18" charset="0"/>
+              </a:rPr>
+              <a:t> (сеттер) — выполняется при присваивании. Получает новое значение через неявный параметр </a:t>
+            </a:r>
+            <a:r>
+              <a:rPr lang="ru-RU" sz="2400" dirty="0" err="1" smtClean="0">
+                <a:latin typeface="Times New Roman" pitchFamily="18" charset="0"/>
+                <a:cs typeface="Times New Roman" pitchFamily="18" charset="0"/>
+              </a:rPr>
+              <a:t>value</a:t>
+            </a:r>
+            <a:r>
+              <a:rPr lang="ru-RU" sz="2400" dirty="0" smtClean="0">
+                <a:latin typeface="Times New Roman" pitchFamily="18" charset="0"/>
+                <a:cs typeface="Times New Roman" pitchFamily="18" charset="0"/>
+              </a:rPr>
+              <a:t>.</a:t>
+            </a:r>
+            <a:endParaRPr lang="ru-RU" sz="2400" dirty="0">
+              <a:latin typeface="Times New Roman" pitchFamily="18" charset="0"/>
+              <a:cs typeface="Times New Roman" pitchFamily="18" charset="0"/>
+            </a:endParaRPr>
           </a:p>
         </p:txBody>
       </p:sp>
       <p:pic>
         <p:nvPicPr>
-          <p:cNvPr id="3075" name="Picture 3"/>
+          <p:cNvPr id="20482" name="Picture 2"/>
           <p:cNvPicPr>
             <a:picLocks noChangeAspect="1" noChangeArrowheads="1"/>
           </p:cNvPicPr>
@@ -4785,8 +5064,8 @@
         </p:blipFill>
         <p:spPr bwMode="auto">
           <a:xfrm>
-            <a:off x="0" y="2428868"/>
-            <a:ext cx="5927876" cy="3429024"/>
+            <a:off x="0" y="2857496"/>
+            <a:ext cx="4219575" cy="3800475"/>
           </a:xfrm>
           <a:prstGeom prst="rect">
             <a:avLst/>
@@ -4801,250 +5080,44 @@
           <a:effectLst/>
         </p:spPr>
       </p:pic>
-      <p:sp>
-        <p:nvSpPr>
-          <p:cNvPr id="33" name="Скругленный прямоугольник 32"/>
-          <p:cNvSpPr/>
+      <p:pic>
+        <p:nvPicPr>
+          <p:cNvPr id="20483" name="Picture 3"/>
+          <p:cNvPicPr>
+            <a:picLocks noChangeAspect="1" noChangeArrowheads="1"/>
+          </p:cNvPicPr>
           <p:nvPr/>
-        </p:nvSpPr>
-        <p:spPr>
-          <a:xfrm>
-            <a:off x="0" y="2357430"/>
-            <a:ext cx="3571868" cy="357190"/>
-          </a:xfrm>
-          <a:prstGeom prst="roundRect">
+        </p:nvPicPr>
+        <p:blipFill>
+          <a:blip r:embed="rId3"/>
+          <a:srcRect/>
+          <a:stretch>
+            <a:fillRect/>
+          </a:stretch>
+        </p:blipFill>
+        <p:spPr bwMode="auto">
+          <a:xfrm>
+            <a:off x="4286248" y="3000372"/>
+            <a:ext cx="4857752" cy="3857628"/>
+          </a:xfrm>
+          <a:prstGeom prst="rect">
             <a:avLst/>
           </a:prstGeom>
           <a:noFill/>
-          <a:ln>
-            <a:solidFill>
-              <a:srgbClr val="FF0000"/>
-            </a:solidFill>
+          <a:ln w="9525">
+            <a:noFill/>
+            <a:miter lim="800000"/>
+            <a:headEnd/>
+            <a:tailEnd/>
           </a:ln>
-        </p:spPr>
-        <p:style>
-          <a:lnRef idx="2">
-            <a:schemeClr val="accent1">
-              <a:shade val="50000"/>
-            </a:schemeClr>
-          </a:lnRef>
-          <a:fillRef idx="1">
-            <a:schemeClr val="accent1"/>
-          </a:fillRef>
-          <a:effectRef idx="0">
-            <a:schemeClr val="accent1"/>
-          </a:effectRef>
-          <a:fontRef idx="minor">
-            <a:schemeClr val="lt1"/>
-          </a:fontRef>
-        </p:style>
-        <p:txBody>
-          <a:bodyPr rtlCol="0" anchor="ctr"/>
-          <a:lstStyle/>
-          <a:p>
-            <a:pPr algn="ctr"/>
-            <a:endParaRPr lang="ru-RU"/>
-          </a:p>
-        </p:txBody>
-      </p:sp>
-      <p:cxnSp>
-        <p:nvCxnSpPr>
-          <p:cNvPr id="34" name="Прямая со стрелкой 33"/>
-          <p:cNvCxnSpPr>
-            <a:stCxn id="43" idx="2"/>
-            <a:endCxn id="40" idx="3"/>
-          </p:cNvCxnSpPr>
-          <p:nvPr/>
-        </p:nvCxnSpPr>
-        <p:spPr>
-          <a:xfrm rot="5400000">
-            <a:off x="5672223" y="2457537"/>
-            <a:ext cx="1264282" cy="2035967"/>
-          </a:xfrm>
-          <a:prstGeom prst="straightConnector1">
-            <a:avLst/>
-          </a:prstGeom>
-          <a:ln w="25400">
-            <a:solidFill>
-              <a:srgbClr val="FF0000"/>
-            </a:solidFill>
-            <a:tailEnd type="arrow"/>
-          </a:ln>
-        </p:spPr>
-        <p:style>
-          <a:lnRef idx="1">
-            <a:schemeClr val="accent1"/>
-          </a:lnRef>
-          <a:fillRef idx="0">
-            <a:schemeClr val="accent1"/>
-          </a:fillRef>
-          <a:effectRef idx="0">
-            <a:schemeClr val="accent1"/>
-          </a:effectRef>
-          <a:fontRef idx="minor">
-            <a:schemeClr val="tx1"/>
-          </a:fontRef>
-        </p:style>
-      </p:cxnSp>
-      <p:sp>
-        <p:nvSpPr>
-          <p:cNvPr id="39" name="Прямоугольник 38"/>
-          <p:cNvSpPr/>
-          <p:nvPr/>
-        </p:nvSpPr>
-        <p:spPr>
-          <a:xfrm>
-            <a:off x="1571604" y="1214422"/>
-            <a:ext cx="4572000" cy="369332"/>
-          </a:xfrm>
-          <a:prstGeom prst="rect">
-            <a:avLst/>
-          </a:prstGeom>
-        </p:spPr>
-        <p:txBody>
-          <a:bodyPr>
-            <a:spAutoFit/>
-          </a:bodyPr>
-          <a:lstStyle/>
-          <a:p>
-            <a:pPr algn="just"/>
-            <a:r>
-              <a:rPr lang="ru-RU" dirty="0" smtClean="0">
-                <a:latin typeface="Cambria" pitchFamily="18" charset="0"/>
-              </a:rPr>
-              <a:t>Инициализация объекта класса</a:t>
-            </a:r>
-          </a:p>
-        </p:txBody>
-      </p:sp>
-      <p:sp>
-        <p:nvSpPr>
-          <p:cNvPr id="40" name="Скругленный прямоугольник 39"/>
-          <p:cNvSpPr/>
-          <p:nvPr/>
-        </p:nvSpPr>
-        <p:spPr>
-          <a:xfrm>
-            <a:off x="785786" y="3571876"/>
-            <a:ext cx="4500594" cy="1071570"/>
-          </a:xfrm>
-          <a:prstGeom prst="roundRect">
-            <a:avLst/>
-          </a:prstGeom>
-          <a:noFill/>
-          <a:ln>
-            <a:solidFill>
-              <a:srgbClr val="FF0000"/>
-            </a:solidFill>
-          </a:ln>
-        </p:spPr>
-        <p:style>
-          <a:lnRef idx="2">
-            <a:schemeClr val="accent1">
-              <a:shade val="50000"/>
-            </a:schemeClr>
-          </a:lnRef>
-          <a:fillRef idx="1">
-            <a:schemeClr val="accent1"/>
-          </a:fillRef>
-          <a:effectRef idx="0">
-            <a:schemeClr val="accent1"/>
-          </a:effectRef>
-          <a:fontRef idx="minor">
-            <a:schemeClr val="lt1"/>
-          </a:fontRef>
-        </p:style>
-        <p:txBody>
-          <a:bodyPr rtlCol="0" anchor="ctr"/>
-          <a:lstStyle/>
-          <a:p>
-            <a:pPr algn="ctr"/>
-            <a:endParaRPr lang="ru-RU"/>
-          </a:p>
-        </p:txBody>
-      </p:sp>
-      <p:sp>
-        <p:nvSpPr>
-          <p:cNvPr id="43" name="Прямоугольник 42"/>
-          <p:cNvSpPr/>
-          <p:nvPr/>
-        </p:nvSpPr>
-        <p:spPr>
-          <a:xfrm>
-            <a:off x="5500694" y="1643050"/>
-            <a:ext cx="3643306" cy="1200329"/>
-          </a:xfrm>
-          <a:prstGeom prst="rect">
-            <a:avLst/>
-          </a:prstGeom>
-        </p:spPr>
-        <p:txBody>
-          <a:bodyPr wrap="square">
-            <a:spAutoFit/>
-          </a:bodyPr>
-          <a:lstStyle/>
-          <a:p>
-            <a:pPr algn="just"/>
-            <a:r>
-              <a:rPr lang="ru-RU" dirty="0" smtClean="0">
-                <a:latin typeface="Cambria" pitchFamily="18" charset="0"/>
-              </a:rPr>
-              <a:t>Запись информации в поля класса, вызов методов класса, отображение с помощью интерфейса полей класса</a:t>
-            </a:r>
-          </a:p>
-        </p:txBody>
-      </p:sp>
-      <p:cxnSp>
-        <p:nvCxnSpPr>
-          <p:cNvPr id="44" name="Прямая со стрелкой 43"/>
-          <p:cNvCxnSpPr>
-            <a:stCxn id="39" idx="2"/>
-            <a:endCxn id="33" idx="0"/>
-          </p:cNvCxnSpPr>
-          <p:nvPr/>
-        </p:nvCxnSpPr>
-        <p:spPr>
-          <a:xfrm rot="5400000">
-            <a:off x="2434931" y="934757"/>
-            <a:ext cx="773676" cy="2071670"/>
-          </a:xfrm>
-          <a:prstGeom prst="straightConnector1">
-            <a:avLst/>
-          </a:prstGeom>
-          <a:ln w="25400">
-            <a:solidFill>
-              <a:srgbClr val="FF0000"/>
-            </a:solidFill>
-            <a:tailEnd type="arrow"/>
-          </a:ln>
-        </p:spPr>
-        <p:style>
-          <a:lnRef idx="1">
-            <a:schemeClr val="accent1"/>
-          </a:lnRef>
-          <a:fillRef idx="0">
-            <a:schemeClr val="accent1"/>
-          </a:fillRef>
-          <a:effectRef idx="0">
-            <a:schemeClr val="accent1"/>
-          </a:effectRef>
-          <a:fontRef idx="minor">
-            <a:schemeClr val="tx1"/>
-          </a:fontRef>
-        </p:style>
-      </p:cxnSp>
+          <a:effectLst/>
+        </p:spPr>
+      </p:pic>
     </p:spTree>
   </p:cSld>
   <p:clrMapOvr>
     <a:masterClrMapping/>
   </p:clrMapOvr>
-  <p:timing>
-    <p:tnLst>
-      <p:par>
-        <p:cTn id="1" dur="indefinite" restart="never" nodeType="tmRoot"/>
-      </p:par>
-    </p:tnLst>
-  </p:timing>
 </p:sld>
 </file>
 
